--- a/snolab_run4_phonon_pulse_analysis/collection_efficiency/presentation/SNOLAB_R4_collection_efficiency_20260910_zh.pptx
+++ b/snolab_run4_phonon_pulse_analysis/collection_efficiency/presentation/SNOLAB_R4_collection_efficiency_20260910_zh.pptx
@@ -4740,7 +4740,7 @@
                 </a:solidFill>
                 <a:latin typeface="Droid Sans Fallback"/>
               </a:rPr>
-              <a:t>李知恒  ·  明尼苏达大学  ·  SuperCDMS SNOLAB Run 4  ·  2026 年 9 月</a:t>
+              <a:t>李志恒  ·  明尼苏达大学  ·  SuperCDMS SNOLAB Run 4  ·  2026 年 9 月</a:t>
             </a:r>
           </a:p>
           <a:p>

--- a/snolab_run4_phonon_pulse_analysis/collection_efficiency/presentation/SNOLAB_R4_collection_efficiency_20260910_zh.pptx
+++ b/snolab_run4_phonon_pulse_analysis/collection_efficiency/presentation/SNOLAB_R4_collection_efficiency_20260910_zh.pptx
@@ -23,6 +23,7 @@
     <p:sldId id="271" r:id="rId23"/>
     <p:sldId id="272" r:id="rId24"/>
     <p:sldId id="273" r:id="rId25"/>
+    <p:sldId id="274" r:id="rId26"/>
   </p:sldIdLst>
   <p:sldSz cx="12191695" cy="6858000" type="screen4x3"/>
   <p:notesSz cx="6858000" cy="9144000"/>
@@ -1069,6 +1070,72 @@
 </file>
 
 <file path=ppt/notesSlides/notesSlide18.xml><?xml version="1.0" encoding="utf-8"?>
+<p:notes xmlns:a="http://schemas.openxmlformats.org/drawingml/2006/main" xmlns:p="http://schemas.openxmlformats.org/presentationml/2006/main" xmlns:r="http://schemas.openxmlformats.org/officeDocument/2006/relationships">
+  <p:cSld>
+    <p:spTree>
+      <p:nvGrpSpPr>
+        <p:cNvPr id="1" name=""/>
+        <p:cNvGrpSpPr/>
+        <p:nvPr/>
+      </p:nvGrpSpPr>
+      <p:grpSpPr>
+        <a:xfrm>
+          <a:off x="0" y="0"/>
+          <a:ext cx="0" cy="0"/>
+          <a:chOff x="0" y="0"/>
+          <a:chExt cx="0" cy="0"/>
+        </a:xfrm>
+      </p:grpSpPr>
+      <p:sp>
+        <p:nvSpPr>
+          <p:cNvPr id="2" name="Slide Image Placeholder 1"/>
+          <p:cNvSpPr>
+            <a:spLocks noGrp="1"/>
+          </p:cNvSpPr>
+          <p:nvPr>
+            <p:ph type="sldImg" idx="2"/>
+          </p:nvPr>
+        </p:nvSpPr>
+        <p:spPr/>
+      </p:sp>
+      <p:sp>
+        <p:nvSpPr>
+          <p:cNvPr id="3" name="Notes Placeholder 2"/>
+          <p:cNvSpPr>
+            <a:spLocks noGrp="1"/>
+          </p:cNvSpPr>
+          <p:nvPr>
+            <p:ph type="body" idx="3" sz="quarter"/>
+          </p:nvPr>
+        </p:nvSpPr>
+        <p:spPr/>
+        <p:txBody>
+          <a:bodyPr/>
+          <a:lstStyle/>
+          <a:p/>
+        </p:txBody>
+      </p:sp>
+      <p:sp>
+        <p:nvSpPr>
+          <p:cNvPr id="4" name="Slide Number Placeholder 3"/>
+          <p:cNvSpPr>
+            <a:spLocks noGrp="1"/>
+          </p:cNvSpPr>
+          <p:nvPr>
+            <p:ph type="sldNum" idx="5" sz="quarter"/>
+          </p:nvPr>
+        </p:nvSpPr>
+        <p:spPr/>
+      </p:sp>
+    </p:spTree>
+  </p:cSld>
+  <p:clrMapOvr>
+    <a:masterClrMapping/>
+  </p:clrMapOvr>
+</p:notes>
+</file>
+
+<file path=ppt/notesSlides/notesSlide19.xml><?xml version="1.0" encoding="utf-8"?>
 <p:notes xmlns:a="http://schemas.openxmlformats.org/drawingml/2006/main" xmlns:p="http://schemas.openxmlformats.org/presentationml/2006/main" xmlns:r="http://schemas.openxmlformats.org/officeDocument/2006/relationships">
   <p:cSld>
     <p:spTree>
@@ -6357,6 +6424,254 @@
           </a:prstGeom>
         </p:spPr>
       </p:pic>
+    </p:spTree>
+  </p:cSld>
+  <p:clrMapOvr>
+    <a:masterClrMapping/>
+  </p:clrMapOvr>
+</p:sld>
+</file>
+
+<file path=ppt/slides/slide19.xml><?xml version="1.0" encoding="utf-8"?>
+<p:sld xmlns:a="http://schemas.openxmlformats.org/drawingml/2006/main" xmlns:p="http://schemas.openxmlformats.org/presentationml/2006/main" xmlns:r="http://schemas.openxmlformats.org/officeDocument/2006/relationships">
+  <p:cSld>
+    <p:spTree>
+      <p:nvGrpSpPr>
+        <p:cNvPr id="1" name=""/>
+        <p:cNvGrpSpPr/>
+        <p:nvPr/>
+      </p:nvGrpSpPr>
+      <p:grpSpPr/>
+      <p:sp>
+        <p:nvSpPr>
+          <p:cNvPr id="2" name="TextBox 1"/>
+          <p:cNvSpPr txBox="1"/>
+          <p:nvPr/>
+        </p:nvSpPr>
+        <p:spPr>
+          <a:xfrm>
+            <a:off x="502920" y="228600"/>
+            <a:ext cx="11247120" cy="731520"/>
+          </a:xfrm>
+          <a:prstGeom prst="rect">
+            <a:avLst/>
+          </a:prstGeom>
+          <a:noFill/>
+        </p:spPr>
+        <p:txBody>
+          <a:bodyPr wrap="square">
+            <a:spAutoFit/>
+          </a:bodyPr>
+          <a:lstStyle/>
+          <a:p>
+            <a:r>
+              <a:rPr sz="2700" b="1" i="0">
+                <a:solidFill>
+                  <a:srgbClr val="1F3864"/>
+                </a:solidFill>
+                <a:latin typeface="Droid Sans Fallback"/>
+              </a:rPr>
+              <a:t>Backup — 事件计数：每一步排除了多少</a:t>
+            </a:r>
+          </a:p>
+        </p:txBody>
+      </p:sp>
+      <p:sp>
+        <p:nvSpPr>
+          <p:cNvPr id="3" name="Rectangle 2"/>
+          <p:cNvSpPr/>
+          <p:nvPr/>
+        </p:nvSpPr>
+        <p:spPr>
+          <a:xfrm>
+            <a:off x="502920" y="969264"/>
+            <a:ext cx="11247120" cy="18000"/>
+          </a:xfrm>
+          <a:prstGeom prst="rect">
+            <a:avLst/>
+          </a:prstGeom>
+          <a:solidFill>
+            <a:srgbClr val="1F3864"/>
+          </a:solidFill>
+          <a:ln>
+            <a:noFill/>
+          </a:ln>
+        </p:spPr>
+        <p:style>
+          <a:lnRef idx="1">
+            <a:schemeClr val="accent1"/>
+          </a:lnRef>
+          <a:fillRef idx="3">
+            <a:schemeClr val="accent1"/>
+          </a:fillRef>
+          <a:effectRef idx="2">
+            <a:schemeClr val="accent1"/>
+          </a:effectRef>
+          <a:fontRef idx="minor">
+            <a:schemeClr val="lt1"/>
+          </a:fontRef>
+        </p:style>
+        <p:txBody>
+          <a:bodyPr rtlCol="0" anchor="ctr"/>
+          <a:lstStyle/>
+          <a:p>
+            <a:pPr algn="ctr"/>
+          </a:p>
+        </p:txBody>
+      </p:sp>
+      <p:sp>
+        <p:nvSpPr>
+          <p:cNvPr id="4" name="TextBox 3"/>
+          <p:cNvSpPr txBox="1"/>
+          <p:nvPr/>
+        </p:nvSpPr>
+        <p:spPr>
+          <a:xfrm>
+            <a:off x="11430000" y="6446520"/>
+            <a:ext cx="548640" cy="320040"/>
+          </a:xfrm>
+          <a:prstGeom prst="rect">
+            <a:avLst/>
+          </a:prstGeom>
+          <a:noFill/>
+        </p:spPr>
+        <p:txBody>
+          <a:bodyPr wrap="square">
+            <a:spAutoFit/>
+          </a:bodyPr>
+          <a:lstStyle/>
+          <a:p>
+            <a:r>
+              <a:rPr sz="1000" b="0" i="0">
+                <a:solidFill>
+                  <a:srgbClr val="666666"/>
+                </a:solidFill>
+                <a:latin typeface="Droid Sans Fallback"/>
+              </a:rPr>
+              <a:t>19</a:t>
+            </a:r>
+          </a:p>
+        </p:txBody>
+      </p:sp>
+      <p:sp>
+        <p:nvSpPr>
+          <p:cNvPr id="5" name="TextBox 4"/>
+          <p:cNvSpPr txBox="1"/>
+          <p:nvPr/>
+        </p:nvSpPr>
+        <p:spPr>
+          <a:xfrm>
+            <a:off x="502920" y="1463040"/>
+            <a:ext cx="11247120" cy="4572000"/>
+          </a:xfrm>
+          <a:prstGeom prst="rect">
+            <a:avLst/>
+          </a:prstGeom>
+          <a:noFill/>
+        </p:spPr>
+        <p:txBody>
+          <a:bodyPr wrap="square">
+            <a:spAutoFit/>
+          </a:bodyPr>
+          <a:lstStyle/>
+          <a:p>
+            <a:pPr>
+              <a:spcAft>
+                <a:spcPts val="800"/>
+              </a:spcAft>
+            </a:pPr>
+            <a:r>
+              <a:rPr sz="1700" b="0" i="0">
+                <a:solidFill>
+                  <a:srgbClr val="333333"/>
+                </a:solidFill>
+                <a:latin typeface="Droid Sans Fallback"/>
+              </a:rPr>
+              <a:t>K 线附近的 PTOFamps 窗口（30 个 series，无 trigger cut）：  2207 个事件</a:t>
+            </a:r>
+          </a:p>
+          <a:p>
+            <a:pPr>
+              <a:spcAft>
+                <a:spcPts val="800"/>
+              </a:spcAft>
+            </a:pPr>
+            <a:r>
+              <a:rPr sz="1700" b="0" i="0">
+                <a:solidFill>
+                  <a:srgbClr val="333333"/>
+                </a:solidFill>
+                <a:latin typeface="Droid Sans Fallback"/>
+              </a:rPr>
+              <a:t>− 276 个（12.5%）：双指数拟合在每个通道上都失败（NRMSE 全部 &gt; 0.2）—— 疑似 pileup / glitch，未逐个检查</a:t>
+            </a:r>
+          </a:p>
+          <a:p>
+            <a:pPr>
+              <a:spcAft>
+                <a:spcPts val="800"/>
+              </a:spcAft>
+            </a:pPr>
+            <a:r>
+              <a:rPr sz="1700" b="0" i="0">
+                <a:solidFill>
+                  <a:srgbClr val="333333"/>
+                </a:solidFill>
+                <a:latin typeface="Droid Sans Fallback"/>
+              </a:rPr>
+              <a:t>= 1931 个至少有一个通道拟合成功</a:t>
+            </a:r>
+          </a:p>
+          <a:p>
+            <a:pPr>
+              <a:spcAft>
+                <a:spcPts val="800"/>
+              </a:spcAft>
+            </a:pPr>
+            <a:r>
+              <a:rPr sz="1700" b="0" i="0">
+                <a:solidFill>
+                  <a:srgbClr val="333333"/>
+                </a:solidFill>
+                <a:latin typeface="Droid Sans Fallback"/>
+              </a:rPr>
+              <a:t>− 104 个：10 个核心通道里至少有一个拟合失败 —— 总能量缺一块，加进去会偏低</a:t>
+            </a:r>
+          </a:p>
+          <a:p>
+            <a:pPr>
+              <a:spcAft>
+                <a:spcPts val="800"/>
+              </a:spcAft>
+            </a:pPr>
+            <a:r>
+              <a:rPr sz="1700" b="1" i="0">
+                <a:solidFill>
+                  <a:srgbClr val="C0392B"/>
+                </a:solidFill>
+                <a:latin typeface="Droid Sans Fallback"/>
+              </a:rPr>
+              <a:t>= 1827 个（占 2207 的 83%）进入总能量分布</a:t>
+            </a:r>
+          </a:p>
+          <a:p>
+            <a:pPr>
+              <a:spcAft>
+                <a:spcPts val="800"/>
+              </a:spcAft>
+            </a:pPr>
+            <a:r>
+              <a:rPr sz="1700" b="0" i="0">
+                <a:solidFill>
+                  <a:srgbClr val="333333"/>
+                </a:solidFill>
+                <a:latin typeface="Droid Sans Fallback"/>
+              </a:rPr>
+              <a:t>通道层面的排除（另算）：  PDS2 不计入（只有 42% 的事件能拟合，而且都是它附近的事件） · PFS2 在 Z7 上没有数据</a:t>
+            </a:r>
+          </a:p>
+        </p:txBody>
+      </p:sp>
     </p:spTree>
   </p:cSld>
   <p:clrMapOvr>

--- a/snolab_run4_phonon_pulse_analysis/collection_efficiency/presentation/SNOLAB_R4_collection_efficiency_20260910_zh.pptx
+++ b/snolab_run4_phonon_pulse_analysis/collection_efficiency/presentation/SNOLAB_R4_collection_efficiency_20260910_zh.pptx
@@ -24,6 +24,7 @@
     <p:sldId id="272" r:id="rId24"/>
     <p:sldId id="273" r:id="rId25"/>
     <p:sldId id="274" r:id="rId26"/>
+    <p:sldId id="275" r:id="rId27"/>
   </p:sldIdLst>
   <p:sldSz cx="12191695" cy="6858000" type="screen4x3"/>
   <p:notesSz cx="6858000" cy="9144000"/>
@@ -1202,6 +1203,72 @@
 </file>
 
 <file path=ppt/notesSlides/notesSlide2.xml><?xml version="1.0" encoding="utf-8"?>
+<p:notes xmlns:a="http://schemas.openxmlformats.org/drawingml/2006/main" xmlns:p="http://schemas.openxmlformats.org/presentationml/2006/main" xmlns:r="http://schemas.openxmlformats.org/officeDocument/2006/relationships">
+  <p:cSld>
+    <p:spTree>
+      <p:nvGrpSpPr>
+        <p:cNvPr id="1" name=""/>
+        <p:cNvGrpSpPr/>
+        <p:nvPr/>
+      </p:nvGrpSpPr>
+      <p:grpSpPr>
+        <a:xfrm>
+          <a:off x="0" y="0"/>
+          <a:ext cx="0" cy="0"/>
+          <a:chOff x="0" y="0"/>
+          <a:chExt cx="0" cy="0"/>
+        </a:xfrm>
+      </p:grpSpPr>
+      <p:sp>
+        <p:nvSpPr>
+          <p:cNvPr id="2" name="Slide Image Placeholder 1"/>
+          <p:cNvSpPr>
+            <a:spLocks noGrp="1"/>
+          </p:cNvSpPr>
+          <p:nvPr>
+            <p:ph type="sldImg" idx="2"/>
+          </p:nvPr>
+        </p:nvSpPr>
+        <p:spPr/>
+      </p:sp>
+      <p:sp>
+        <p:nvSpPr>
+          <p:cNvPr id="3" name="Notes Placeholder 2"/>
+          <p:cNvSpPr>
+            <a:spLocks noGrp="1"/>
+          </p:cNvSpPr>
+          <p:nvPr>
+            <p:ph type="body" idx="3" sz="quarter"/>
+          </p:nvPr>
+        </p:nvSpPr>
+        <p:spPr/>
+        <p:txBody>
+          <a:bodyPr/>
+          <a:lstStyle/>
+          <a:p/>
+        </p:txBody>
+      </p:sp>
+      <p:sp>
+        <p:nvSpPr>
+          <p:cNvPr id="4" name="Slide Number Placeholder 3"/>
+          <p:cNvSpPr>
+            <a:spLocks noGrp="1"/>
+          </p:cNvSpPr>
+          <p:nvPr>
+            <p:ph type="sldNum" idx="5" sz="quarter"/>
+          </p:nvPr>
+        </p:nvSpPr>
+        <p:spPr/>
+      </p:sp>
+    </p:spTree>
+  </p:cSld>
+  <p:clrMapOvr>
+    <a:masterClrMapping/>
+  </p:clrMapOvr>
+</p:notes>
+</file>
+
+<file path=ppt/notesSlides/notesSlide20.xml><?xml version="1.0" encoding="utf-8"?>
 <p:notes xmlns:a="http://schemas.openxmlformats.org/drawingml/2006/main" xmlns:p="http://schemas.openxmlformats.org/presentationml/2006/main" xmlns:r="http://schemas.openxmlformats.org/officeDocument/2006/relationships">
   <p:cSld>
     <p:spTree>
@@ -6892,6 +6959,214 @@
                 <a:latin typeface="Droid Sans Fallback"/>
               </a:rPr>
               <a:t>样本：Z7，Ge 活化的 K 线事件，来自 SNOLAB R4（2207 个事件，30 个 series，11 个通道）。</a:t>
+            </a:r>
+          </a:p>
+        </p:txBody>
+      </p:sp>
+    </p:spTree>
+  </p:cSld>
+  <p:clrMapOvr>
+    <a:masterClrMapping/>
+  </p:clrMapOvr>
+</p:sld>
+</file>
+
+<file path=ppt/slides/slide20.xml><?xml version="1.0" encoding="utf-8"?>
+<p:sld xmlns:a="http://schemas.openxmlformats.org/drawingml/2006/main" xmlns:p="http://schemas.openxmlformats.org/presentationml/2006/main" xmlns:r="http://schemas.openxmlformats.org/officeDocument/2006/relationships">
+  <p:cSld>
+    <p:spTree>
+      <p:nvGrpSpPr>
+        <p:cNvPr id="1" name=""/>
+        <p:cNvGrpSpPr/>
+        <p:nvPr/>
+      </p:nvGrpSpPr>
+      <p:grpSpPr/>
+      <p:sp>
+        <p:nvSpPr>
+          <p:cNvPr id="2" name="TextBox 1"/>
+          <p:cNvSpPr txBox="1"/>
+          <p:nvPr/>
+        </p:nvSpPr>
+        <p:spPr>
+          <a:xfrm>
+            <a:off x="502920" y="228600"/>
+            <a:ext cx="11247120" cy="731520"/>
+          </a:xfrm>
+          <a:prstGeom prst="rect">
+            <a:avLst/>
+          </a:prstGeom>
+          <a:noFill/>
+        </p:spPr>
+        <p:txBody>
+          <a:bodyPr wrap="square">
+            <a:spAutoFit/>
+          </a:bodyPr>
+          <a:lstStyle/>
+          <a:p>
+            <a:r>
+              <a:rPr sz="2700" b="1" i="0">
+                <a:solidFill>
+                  <a:srgbClr val="1F3864"/>
+                </a:solidFill>
+                <a:latin typeface="Droid Sans Fallback"/>
+              </a:rPr>
+              <a:t>Backup — 系数背后的 TES 偏置电流 I₀</a:t>
+            </a:r>
+          </a:p>
+        </p:txBody>
+      </p:sp>
+      <p:sp>
+        <p:nvSpPr>
+          <p:cNvPr id="3" name="Rectangle 2"/>
+          <p:cNvSpPr/>
+          <p:nvPr/>
+        </p:nvSpPr>
+        <p:spPr>
+          <a:xfrm>
+            <a:off x="502920" y="969264"/>
+            <a:ext cx="11247120" cy="18000"/>
+          </a:xfrm>
+          <a:prstGeom prst="rect">
+            <a:avLst/>
+          </a:prstGeom>
+          <a:solidFill>
+            <a:srgbClr val="1F3864"/>
+          </a:solidFill>
+          <a:ln>
+            <a:noFill/>
+          </a:ln>
+        </p:spPr>
+        <p:style>
+          <a:lnRef idx="1">
+            <a:schemeClr val="accent1"/>
+          </a:lnRef>
+          <a:fillRef idx="3">
+            <a:schemeClr val="accent1"/>
+          </a:fillRef>
+          <a:effectRef idx="2">
+            <a:schemeClr val="accent1"/>
+          </a:effectRef>
+          <a:fontRef idx="minor">
+            <a:schemeClr val="lt1"/>
+          </a:fontRef>
+        </p:style>
+        <p:txBody>
+          <a:bodyPr rtlCol="0" anchor="ctr"/>
+          <a:lstStyle/>
+          <a:p>
+            <a:pPr algn="ctr"/>
+          </a:p>
+        </p:txBody>
+      </p:sp>
+      <p:sp>
+        <p:nvSpPr>
+          <p:cNvPr id="4" name="TextBox 3"/>
+          <p:cNvSpPr txBox="1"/>
+          <p:nvPr/>
+        </p:nvSpPr>
+        <p:spPr>
+          <a:xfrm>
+            <a:off x="11430000" y="6446520"/>
+            <a:ext cx="548640" cy="320040"/>
+          </a:xfrm>
+          <a:prstGeom prst="rect">
+            <a:avLst/>
+          </a:prstGeom>
+          <a:noFill/>
+        </p:spPr>
+        <p:txBody>
+          <a:bodyPr wrap="square">
+            <a:spAutoFit/>
+          </a:bodyPr>
+          <a:lstStyle/>
+          <a:p>
+            <a:r>
+              <a:rPr sz="1000" b="0" i="0">
+                <a:solidFill>
+                  <a:srgbClr val="666666"/>
+                </a:solidFill>
+                <a:latin typeface="Droid Sans Fallback"/>
+              </a:rPr>
+              <a:t>20</a:t>
+            </a:r>
+          </a:p>
+        </p:txBody>
+      </p:sp>
+      <p:pic>
+        <p:nvPicPr>
+          <p:cNvPr id="5" name="Picture 4" descr="i0_histogram.png"/>
+          <p:cNvPicPr>
+            <a:picLocks noChangeAspect="1"/>
+          </p:cNvPicPr>
+          <p:nvPr/>
+        </p:nvPicPr>
+        <p:blipFill>
+          <a:blip r:embed="rId3"/>
+          <a:stretch>
+            <a:fillRect/>
+          </a:stretch>
+        </p:blipFill>
+        <p:spPr>
+          <a:xfrm>
+            <a:off x="2002715" y="1143000"/>
+            <a:ext cx="8247529" cy="4572000"/>
+          </a:xfrm>
+          <a:prstGeom prst="rect">
+            <a:avLst/>
+          </a:prstGeom>
+        </p:spPr>
+      </p:pic>
+      <p:sp>
+        <p:nvSpPr>
+          <p:cNvPr id="6" name="TextBox 5"/>
+          <p:cNvSpPr txBox="1"/>
+          <p:nvPr/>
+        </p:nvSpPr>
+        <p:spPr>
+          <a:xfrm>
+            <a:off x="502920" y="5715000"/>
+            <a:ext cx="11247120" cy="1005840"/>
+          </a:xfrm>
+          <a:prstGeom prst="rect">
+            <a:avLst/>
+          </a:prstGeom>
+          <a:noFill/>
+        </p:spPr>
+        <p:txBody>
+          <a:bodyPr wrap="square">
+            <a:spAutoFit/>
+          </a:bodyPr>
+          <a:lstStyle/>
+          <a:p>
+            <a:pPr>
+              <a:spcAft>
+                <a:spcPts val="800"/>
+              </a:spcAft>
+            </a:pPr>
+            <a:r>
+              <a:rPr sz="1200" b="0" i="0">
+                <a:solidFill>
+                  <a:srgbClr val="333333"/>
+                </a:solidFill>
+                <a:latin typeface="Droid Sans Fallback"/>
+              </a:rPr>
+              <a:t>每个通道每个 series 一个 I₀（detectorConfig，30 个 series），按进入求和的 1827 个事件加权。红色虚线：所有 series 都用的那个值（第一个 series，如 PBS1 −18.07 µA）。</a:t>
+            </a:r>
+          </a:p>
+          <a:p>
+            <a:pPr>
+              <a:spcAft>
+                <a:spcPts val="800"/>
+              </a:spcAft>
+            </a:pPr>
+            <a:r>
+              <a:rPr sz="1200" b="1" i="0">
+                <a:solidFill>
+                  <a:srgbClr val="C0392B"/>
+                </a:solidFill>
+                <a:latin typeface="Droid Sans Fallback"/>
+              </a:rPr>
+              <a:t>两个偏置状态：6 月 17–20 日（1225 个事件）就是所用的值；6 月 21–23 日（602 个事件）|I₀| 大 10%、R₀ 小 20%。两个状态下拟合出的脉冲一样（能量和下降时间差 2% 以内）；官方按 series 算的 Eabs 在第二个状态低 16.5%。待解决。</a:t>
             </a:r>
           </a:p>
         </p:txBody>

--- a/snolab_run4_phonon_pulse_analysis/collection_efficiency/presentation/SNOLAB_R4_collection_efficiency_20260910_zh.pptx
+++ b/snolab_run4_phonon_pulse_analysis/collection_efficiency/presentation/SNOLAB_R4_collection_efficiency_20260910_zh.pptx
@@ -7166,7 +7166,7 @@
                 </a:solidFill>
                 <a:latin typeface="Droid Sans Fallback"/>
               </a:rPr>
-              <a:t>两个偏置状态：6 月 17–20 日（1225 个事件）就是所用的值；6 月 21–23 日（602 个事件）|I₀| 大 10%、R₀ 小 20%。两个状态下拟合出的脉冲一样（能量和下降时间差 2% 以内）；官方按 series 算的 Eabs 在第二个状态低 16.5%。待解决。</a:t>
+              <a:t>两个偏置状态：6 月 17–20 日（1225 个事件）就是所用的值；6 月 21–23 日（602 个事件）|I₀| 大 10%、R₀ 小 20%。两个状态下拟合出的脉冲一样（能量和下降时间差 2% 以内）；组里的标准处理（Default_tag，逐 series 用各自配置）在第二个状态给出的 Eabs 低 16.5%。待解决。</a:t>
             </a:r>
           </a:p>
         </p:txBody>

--- a/snolab_run4_phonon_pulse_analysis/collection_efficiency/presentation/SNOLAB_R4_collection_efficiency_20260910_zh.pptx
+++ b/snolab_run4_phonon_pulse_analysis/collection_efficiency/presentation/SNOLAB_R4_collection_efficiency_20260910_zh.pptx
@@ -4937,7 +4937,7 @@
                 </a:solidFill>
                 <a:latin typeface="Droid Sans Fallback"/>
               </a:rPr>
-              <a:t>各通道求和：30.5%</a:t>
+              <a:t>各通道求和：30.4%</a:t>
             </a:r>
           </a:p>
           <a:p>
@@ -5046,8 +5046,8 @@
         </p:blipFill>
         <p:spPr>
           <a:xfrm>
-            <a:off x="502920" y="1173806"/>
-            <a:ext cx="8046719" cy="5333348"/>
+            <a:off x="502920" y="1175434"/>
+            <a:ext cx="8046719" cy="5330092"/>
           </a:xfrm>
           <a:prstGeom prst="rect">
             <a:avLst/>
@@ -5088,7 +5088,7 @@
                 </a:solidFill>
                 <a:latin typeface="Droid Sans Fallback"/>
               </a:rPr>
-              <a:t>10 个通道求和，1827 个事件：3162 eV = 30.5%，宽度降到 7.5% —— 位置效应抵消了。</a:t>
+              <a:t>10 个通道求和，1225 个事件：3155 eV = 30.4%，宽度降到 7.6% —— 位置效应抵消了。</a:t>
             </a:r>
           </a:p>
           <a:p>
@@ -5120,7 +5120,7 @@
                 </a:solidFill>
                 <a:latin typeface="Droid Sans Fallback"/>
               </a:rPr>
-              <a:t>收集效率 30.5% ± 2.3%（σ/μ = 7.5%）。</a:t>
+              <a:t>收集效率 30.4% ± 2.3%（σ/μ = 7.6%）。</a:t>
             </a:r>
           </a:p>
           <a:p>
@@ -5336,7 +5336,7 @@
                 </a:solidFill>
                 <a:latin typeface="Droid Sans Fallback"/>
               </a:rPr>
-              <a:t>Z7 把一个 10.37 keV 事件的 30.5% ± 2.3%（σ/μ = 7.5%）吸收进 TES，10 个通道求和。   CDMS 文档在 R37 CUTE tower 上得到的是 26–41%。</a:t>
+              <a:t>Z7 把一个 10.37 keV 事件的 30.4% ± 2.3%（σ/μ = 7.6%）吸收进 TES，10 个通道求和。   CDMS 文档在 R37 CUTE tower 上得到的是 26–41%。</a:t>
             </a:r>
           </a:p>
           <a:p>
@@ -5352,7 +5352,7 @@
                 </a:solidFill>
                 <a:latin typeface="Droid Sans Fallback"/>
               </a:rPr>
-              <a:t>还没落实：只做了 Z7 · Z7 的偏压没有确认（按 0 V 算） · 没有 dI/dV · PDS2 没有算进去 · 12.5% 的事件在任何通道都拟合不上。</a:t>
+              <a:t>还没落实：只做了 Z7 · Z7 的偏压没有确认（按 0 V 算） · 没有 dI/dV · PDS2 没有算进去 · 11% 的事件在任何通道都拟合不上 · 后 13 个 series（偏置点不同）没有用。</a:t>
             </a:r>
           </a:p>
         </p:txBody>
@@ -5689,7 +5689,7 @@
                 </a:solidFill>
                 <a:latin typeface="Droid Sans Fallback"/>
               </a:rPr>
-              <a:t>两者只有二次项不同：能量差 1.7%（PBS1，15 个事件的中位数）—— 远小于单通道 15% 的宽度和求和后 7.5% 的宽度。</a:t>
+              <a:t>两者只有二次项不同：能量差 1.7%（PBS1，15 个事件的中位数）—— 远小于单通道 15% 的宽度和求和后 7.6% 的宽度。</a:t>
             </a:r>
           </a:p>
           <a:p>
@@ -6654,7 +6654,7 @@
                 </a:solidFill>
                 <a:latin typeface="Droid Sans Fallback"/>
               </a:rPr>
-              <a:t>K 线附近的 PTOFamps 窗口（30 个 series，无 trigger cut）：  2207 个事件</a:t>
+              <a:t>17 个 series，6 月 17–20 日（6 月 21 日起的 13 个 series 偏置点不同，不用）</a:t>
             </a:r>
           </a:p>
           <a:p>
@@ -6670,7 +6670,7 @@
                 </a:solidFill>
                 <a:latin typeface="Droid Sans Fallback"/>
               </a:rPr>
-              <a:t>− 276 个（12.5%）：双指数拟合在每个通道上都失败（NRMSE 全部 &gt; 0.2）—— 疑似 pileup / glitch，未逐个检查</a:t>
+              <a:t>K 线附近的 PTOFamps 窗口（无 trigger cut）：  1442 个事件</a:t>
             </a:r>
           </a:p>
           <a:p>
@@ -6686,7 +6686,7 @@
                 </a:solidFill>
                 <a:latin typeface="Droid Sans Fallback"/>
               </a:rPr>
-              <a:t>= 1931 个至少有一个通道拟合成功</a:t>
+              <a:t>− 158 个（11%）：双指数拟合在每个通道上都失败（NRMSE 全部 &gt; 0.2）—— 疑似 pileup / glitch，未逐个检查</a:t>
             </a:r>
           </a:p>
           <a:p>
@@ -6702,7 +6702,7 @@
                 </a:solidFill>
                 <a:latin typeface="Droid Sans Fallback"/>
               </a:rPr>
-              <a:t>− 104 个：10 个核心通道里至少有一个拟合失败 —— 总能量缺一块，加进去会偏低</a:t>
+              <a:t>= 1284 个至少有一个通道拟合成功</a:t>
             </a:r>
           </a:p>
           <a:p>
@@ -6712,13 +6712,29 @@
               </a:spcAft>
             </a:pPr>
             <a:r>
-              <a:rPr sz="1700" b="1" i="0">
-                <a:solidFill>
-                  <a:srgbClr val="C0392B"/>
+              <a:rPr sz="1700" b="0" i="0">
+                <a:solidFill>
+                  <a:srgbClr val="333333"/>
                 </a:solidFill>
                 <a:latin typeface="Droid Sans Fallback"/>
               </a:rPr>
-              <a:t>= 1827 个（占 2207 的 83%）进入总能量分布</a:t>
+              <a:t>− 59 个：10 个核心通道里至少有一个拟合失败 —— 总能量缺一块，加进去会偏低</a:t>
+            </a:r>
+          </a:p>
+          <a:p>
+            <a:pPr>
+              <a:spcAft>
+                <a:spcPts val="800"/>
+              </a:spcAft>
+            </a:pPr>
+            <a:r>
+              <a:rPr sz="1700" b="1" i="0">
+                <a:solidFill>
+                  <a:srgbClr val="C0392B"/>
+                </a:solidFill>
+                <a:latin typeface="Droid Sans Fallback"/>
+              </a:rPr>
+              <a:t>= 1225 个（占 1442 的 85%）进入总能量分布</a:t>
             </a:r>
           </a:p>
           <a:p>
@@ -6958,7 +6974,7 @@
                 </a:solidFill>
                 <a:latin typeface="Droid Sans Fallback"/>
               </a:rPr>
-              <a:t>样本：Z7，Ge 活化的 K 线事件，来自 SNOLAB R4（2207 个事件，30 个 series，11 个通道）。</a:t>
+              <a:t>样本：Z7，Ge 活化的 K 线事件，来自 SNOLAB R4（1442 个事件，17 个 series，11 个通道）。</a:t>
             </a:r>
           </a:p>
         </p:txBody>
@@ -7150,7 +7166,7 @@
                 </a:solidFill>
                 <a:latin typeface="Droid Sans Fallback"/>
               </a:rPr>
-              <a:t>每个通道每个 series 一个 I₀（detectorConfig，30 个 series），按进入求和的 1827 个事件加权。红色虚线：所有 series 都用的那个值（第一个 series，如 PBS1 −18.07 µA）。</a:t>
+              <a:t>每个通道每个 series 一个 I₀（detectorConfig，全部 30 个 series），按进入求和的事件加权。红色虚线：所有 series 都用的那个值（第一个 series，如 PBS1 −18.07 µA）。</a:t>
             </a:r>
           </a:p>
           <a:p>
@@ -7166,7 +7182,7 @@
                 </a:solidFill>
                 <a:latin typeface="Droid Sans Fallback"/>
               </a:rPr>
-              <a:t>两个偏置状态：6 月 17–20 日（1225 个事件）就是所用的值；6 月 21–23 日（602 个事件）|I₀| 大 10%、R₀ 小 20%。两个状态下拟合出的脉冲一样（能量和下降时间差 2% 以内）；组里的标准处理（Default_tag，逐 series 用各自配置）在第二个状态给出的 Eabs 低 16.5%。待解决。</a:t>
+              <a:t>两个偏置状态：6 月 17–20 日（1225 个事件）就是所用的值；6 月 21–23 日（602 个事件）|I₀| 大 10%、R₀ 小 20%。两个状态下拟合出的脉冲一样（能量和下降时间差 2% 以内）；组里的标准处理（Default_tag，逐 series 用各自配置）在第二个状态给出的 Eabs 低 16.5%。老师决定：后 13 个 series 不用，结果用第一个状态的 17 个 series。</a:t>
             </a:r>
           </a:p>
         </p:txBody>
@@ -8491,7 +8507,7 @@
                 </a:solidFill>
                 <a:latin typeface="Droid Sans Fallback"/>
               </a:rPr>
-              <a:t>PBS1，1917 个 K 线事件，每个事件一次拟合、一次积分</a:t>
+              <a:t>PBS1，1273 个 K 线事件，每个事件一次拟合、一次积分</a:t>
             </a:r>
           </a:p>
         </p:txBody>
@@ -8647,7 +8663,7 @@
                 </a:solidFill>
                 <a:latin typeface="Droid Sans Fallback"/>
               </a:rPr>
-              <a:t>峰 285 eV，宽度 15% —— 这可是一条能量固定的谱线。</a:t>
+              <a:t>峰 287 eV，宽度 15% —— 这可是一条能量固定的谱线。</a:t>
             </a:r>
           </a:p>
           <a:p>

--- a/snolab_run4_phonon_pulse_analysis/collection_efficiency/presentation/SNOLAB_R4_collection_efficiency_20260910_zh.pptx
+++ b/snolab_run4_phonon_pulse_analysis/collection_efficiency/presentation/SNOLAB_R4_collection_efficiency_20260910_zh.pptx
@@ -7182,7 +7182,7 @@
                 </a:solidFill>
                 <a:latin typeface="Droid Sans Fallback"/>
               </a:rPr>
-              <a:t>两个偏置状态：6 月 17–20 日（1225 个事件）就是所用的值；6 月 21–23 日（602 个事件）|I₀| 大 10%、R₀ 小 20%。两个状态下拟合出的脉冲一样（能量和下降时间差 2% 以内）；组里的标准处理（Default_tag，逐 series 用各自配置）在第二个状态给出的 Eabs 低 16.5%。老师决定：后 13 个 series 不用，结果用第一个状态的 17 个 series。</a:t>
+              <a:t>两个偏置状态：6 月 17–20 日（1225 个事件）就是所用的值；6 月 21–23 日（602 个事件）|I₀| 大 10%、R₀ 小 20%。两个状态下拟合出的脉冲一样（能量差 1% 以内，上升/下降时间差 4% 以内）；组里的标准处理（Default_tag，逐 series 用各自配置）在第二个状态给出的 Eabs 低 16.5%。老师决定：后 13 个 series 不用，结果用第一个状态的 17 个 series。</a:t>
             </a:r>
           </a:p>
         </p:txBody>
